--- a/Slide/MicroController/09.Polling.pptx
+++ b/Slide/MicroController/09.Polling.pptx
@@ -256,7 +256,7 @@
           <a:p>
             <a:fld id="{ECA3AE87-C17F-4F2C-92FF-7FE21F8A66BE}" type="datetimeFigureOut">
               <a:rPr lang="en-US" smtClean="0"/>
-              <a:t>2/2/2025</a:t>
+              <a:t>2/11/2025</a:t>
             </a:fld>
             <a:endParaRPr lang="en-US"/>
           </a:p>
@@ -424,7 +424,7 @@
           <a:p>
             <a:fld id="{ECA3AE87-C17F-4F2C-92FF-7FE21F8A66BE}" type="datetimeFigureOut">
               <a:rPr lang="en-US" smtClean="0"/>
-              <a:t>2/2/2025</a:t>
+              <a:t>2/11/2025</a:t>
             </a:fld>
             <a:endParaRPr lang="en-US"/>
           </a:p>
@@ -602,7 +602,7 @@
           <a:p>
             <a:fld id="{ECA3AE87-C17F-4F2C-92FF-7FE21F8A66BE}" type="datetimeFigureOut">
               <a:rPr lang="en-US" smtClean="0"/>
-              <a:t>2/2/2025</a:t>
+              <a:t>2/11/2025</a:t>
             </a:fld>
             <a:endParaRPr lang="en-US"/>
           </a:p>
@@ -770,7 +770,7 @@
           <a:p>
             <a:fld id="{ECA3AE87-C17F-4F2C-92FF-7FE21F8A66BE}" type="datetimeFigureOut">
               <a:rPr lang="en-US" smtClean="0"/>
-              <a:t>2/2/2025</a:t>
+              <a:t>2/11/2025</a:t>
             </a:fld>
             <a:endParaRPr lang="en-US"/>
           </a:p>
@@ -1015,7 +1015,7 @@
           <a:p>
             <a:fld id="{ECA3AE87-C17F-4F2C-92FF-7FE21F8A66BE}" type="datetimeFigureOut">
               <a:rPr lang="en-US" smtClean="0"/>
-              <a:t>2/2/2025</a:t>
+              <a:t>2/11/2025</a:t>
             </a:fld>
             <a:endParaRPr lang="en-US"/>
           </a:p>
@@ -1244,7 +1244,7 @@
           <a:p>
             <a:fld id="{ECA3AE87-C17F-4F2C-92FF-7FE21F8A66BE}" type="datetimeFigureOut">
               <a:rPr lang="en-US" smtClean="0"/>
-              <a:t>2/2/2025</a:t>
+              <a:t>2/11/2025</a:t>
             </a:fld>
             <a:endParaRPr lang="en-US"/>
           </a:p>
@@ -1608,7 +1608,7 @@
           <a:p>
             <a:fld id="{ECA3AE87-C17F-4F2C-92FF-7FE21F8A66BE}" type="datetimeFigureOut">
               <a:rPr lang="en-US" smtClean="0"/>
-              <a:t>2/2/2025</a:t>
+              <a:t>2/11/2025</a:t>
             </a:fld>
             <a:endParaRPr lang="en-US"/>
           </a:p>
@@ -1725,7 +1725,7 @@
           <a:p>
             <a:fld id="{ECA3AE87-C17F-4F2C-92FF-7FE21F8A66BE}" type="datetimeFigureOut">
               <a:rPr lang="en-US" smtClean="0"/>
-              <a:t>2/2/2025</a:t>
+              <a:t>2/11/2025</a:t>
             </a:fld>
             <a:endParaRPr lang="en-US"/>
           </a:p>
@@ -1820,7 +1820,7 @@
           <a:p>
             <a:fld id="{ECA3AE87-C17F-4F2C-92FF-7FE21F8A66BE}" type="datetimeFigureOut">
               <a:rPr lang="en-US" smtClean="0"/>
-              <a:t>2/2/2025</a:t>
+              <a:t>2/11/2025</a:t>
             </a:fld>
             <a:endParaRPr lang="en-US"/>
           </a:p>
@@ -2095,7 +2095,7 @@
           <a:p>
             <a:fld id="{ECA3AE87-C17F-4F2C-92FF-7FE21F8A66BE}" type="datetimeFigureOut">
               <a:rPr lang="en-US" smtClean="0"/>
-              <a:t>2/2/2025</a:t>
+              <a:t>2/11/2025</a:t>
             </a:fld>
             <a:endParaRPr lang="en-US"/>
           </a:p>
@@ -2347,7 +2347,7 @@
           <a:p>
             <a:fld id="{ECA3AE87-C17F-4F2C-92FF-7FE21F8A66BE}" type="datetimeFigureOut">
               <a:rPr lang="en-US" smtClean="0"/>
-              <a:t>2/2/2025</a:t>
+              <a:t>2/11/2025</a:t>
             </a:fld>
             <a:endParaRPr lang="en-US"/>
           </a:p>
@@ -2558,7 +2558,7 @@
           <a:p>
             <a:fld id="{ECA3AE87-C17F-4F2C-92FF-7FE21F8A66BE}" type="datetimeFigureOut">
               <a:rPr lang="en-US" smtClean="0"/>
-              <a:t>2/2/2025</a:t>
+              <a:t>2/11/2025</a:t>
             </a:fld>
             <a:endParaRPr lang="en-US"/>
           </a:p>
@@ -3276,7 +3276,7 @@
         </p:nvSpPr>
         <p:spPr>
           <a:xfrm>
-            <a:off x="914400" y="3937960"/>
+            <a:off x="986828" y="3931665"/>
             <a:ext cx="1587260" cy="845388"/>
           </a:xfrm>
           <a:prstGeom prst="rect">
@@ -3327,7 +3327,7 @@
         </p:nvCxnSpPr>
         <p:spPr>
           <a:xfrm>
-            <a:off x="2501660" y="4360654"/>
+            <a:off x="2574088" y="4354359"/>
             <a:ext cx="7332453" cy="17253"/>
           </a:xfrm>
           <a:prstGeom prst="line">
@@ -3363,8 +3363,8 @@
         </p:nvSpPr>
         <p:spPr>
           <a:xfrm>
-            <a:off x="3303917" y="5270740"/>
-            <a:ext cx="1138687" cy="741871"/>
+            <a:off x="3376943" y="5287993"/>
+            <a:ext cx="1059255" cy="724618"/>
           </a:xfrm>
           <a:prstGeom prst="rect">
             <a:avLst/>
@@ -3395,6 +3395,10 @@
               <a:rPr lang="en-US"/>
               <a:t>Periph1</a:t>
             </a:r>
+          </a:p>
+          <a:p>
+            <a:pPr algn="ctr"/>
+            <a:endParaRPr lang="en-US"/>
           </a:p>
         </p:txBody>
       </p:sp>
@@ -3408,14 +3412,15 @@
             </a:extLst>
           </p:cNvPr>
           <p:cNvCxnSpPr>
+            <a:cxnSpLocks/>
             <a:stCxn id="8" idx="0"/>
           </p:cNvCxnSpPr>
           <p:nvPr/>
         </p:nvCxnSpPr>
         <p:spPr>
           <a:xfrm flipH="1" flipV="1">
-            <a:off x="3856008" y="4360654"/>
-            <a:ext cx="17253" cy="910086"/>
+            <a:off x="3886304" y="4360654"/>
+            <a:ext cx="20267" cy="927339"/>
           </a:xfrm>
           <a:prstGeom prst="line">
             <a:avLst/>
